--- a/coastal-18-about-me.pptx
+++ b/coastal-18-about-me.pptx
@@ -3316,7 +3316,7 @@
         </p:nvSpPr>
         <p:spPr>
           <a:xfrm>
-            <a:off x="762000" y="10925175"/>
+            <a:off x="762000" y="11753850"/>
             <a:ext cx="8763000" cy="9525"/>
           </a:xfrm>
           <a:prstGeom prst="rect">
@@ -3360,7 +3360,7 @@
         </p:nvSpPr>
         <p:spPr>
           <a:xfrm>
-            <a:off x="762000" y="11572875"/>
+            <a:off x="762000" y="12658725"/>
             <a:ext cx="8763000" cy="9525"/>
           </a:xfrm>
           <a:prstGeom prst="rect">
@@ -3404,7 +3404,7 @@
         </p:nvSpPr>
         <p:spPr>
           <a:xfrm>
-            <a:off x="762000" y="12220575"/>
+            <a:off x="762000" y="13563600"/>
             <a:ext cx="8763000" cy="9525"/>
           </a:xfrm>
           <a:prstGeom prst="rect">
@@ -3448,8 +3448,8 @@
         </p:nvSpPr>
         <p:spPr>
           <a:xfrm>
-            <a:off x="762000" y="15840075"/>
-            <a:ext cx="2830711" cy="9525"/>
+            <a:off x="762000" y="15621000"/>
+            <a:ext cx="3895427" cy="9525"/>
           </a:xfrm>
           <a:prstGeom prst="rect">
             <a:avLst/>
@@ -3493,7 +3493,7 @@
         <p:spPr>
           <a:xfrm>
             <a:off x="762000" y="16373475"/>
-            <a:ext cx="2830711" cy="9525"/>
+            <a:ext cx="3895427" cy="9525"/>
           </a:xfrm>
           <a:prstGeom prst="rect">
             <a:avLst/>
@@ -3536,8 +3536,8 @@
         </p:nvSpPr>
         <p:spPr>
           <a:xfrm>
-            <a:off x="762000" y="15840075"/>
-            <a:ext cx="9525" cy="542925"/>
+            <a:off x="762000" y="15621000"/>
+            <a:ext cx="9525" cy="762000"/>
           </a:xfrm>
           <a:prstGeom prst="rect">
             <a:avLst/>
@@ -3580,8 +3580,8 @@
         </p:nvSpPr>
         <p:spPr>
           <a:xfrm>
-            <a:off x="3583186" y="15840075"/>
-            <a:ext cx="9525" cy="542925"/>
+            <a:off x="4647902" y="15621000"/>
+            <a:ext cx="9525" cy="762000"/>
           </a:xfrm>
           <a:prstGeom prst="rect">
             <a:avLst/>
@@ -3624,7 +3624,7 @@
         </p:nvSpPr>
         <p:spPr>
           <a:xfrm>
-            <a:off x="1041493" y="16057656"/>
+            <a:off x="1079593" y="15948118"/>
             <a:ext cx="107763" cy="107763"/>
           </a:xfrm>
           <a:prstGeom prst="rect">
@@ -3707,8 +3707,8 @@
         </p:nvSpPr>
         <p:spPr>
           <a:xfrm>
-            <a:off x="7903220" y="938212"/>
-            <a:ext cx="2975848" cy="104775"/>
+            <a:off x="6988076" y="904875"/>
+            <a:ext cx="4440079" cy="171450"/>
           </a:xfrm>
           <a:prstGeom prst="rect">
             <a:avLst/>
@@ -3721,7 +3721,7 @@
           <a:p>
             <a:pPr algn="l"/>
             <a:r>
-              <a:rPr sz="750" i="0" b="1" spc="240">
+              <a:rPr sz="1200" i="0" b="1" spc="360">
                 <a:solidFill>
                   <a:srgbClr val="332C46"/>
                 </a:solidFill>
@@ -3742,8 +3742,8 @@
         </p:nvSpPr>
         <p:spPr>
           <a:xfrm>
-            <a:off x="-3276600" y="6000750"/>
-            <a:ext cx="16840200" cy="142875"/>
+            <a:off x="-3276600" y="6648450"/>
+            <a:ext cx="16840200" cy="228600"/>
           </a:xfrm>
           <a:prstGeom prst="rect">
             <a:avLst/>
@@ -3756,7 +3756,7 @@
           <a:p>
             <a:pPr algn="ctr"/>
             <a:r>
-              <a:rPr sz="975" i="0" b="1" spc="351">
+              <a:rPr sz="1575" i="0" b="1" spc="472">
                 <a:solidFill>
                   <a:srgbClr val="A98BA6"/>
                 </a:solidFill>
@@ -3777,8 +3777,8 @@
         </p:nvSpPr>
         <p:spPr>
           <a:xfrm>
-            <a:off x="-3276600" y="6276975"/>
-            <a:ext cx="16840200" cy="704850"/>
+            <a:off x="-3276600" y="7029450"/>
+            <a:ext cx="16840200" cy="857250"/>
           </a:xfrm>
           <a:prstGeom prst="rect">
             <a:avLst/>
@@ -3791,7 +3791,7 @@
           <a:p>
             <a:pPr algn="ctr"/>
             <a:r>
-              <a:rPr sz="4800" i="1" b="0">
+              <a:rPr sz="5850" i="1" b="0">
                 <a:solidFill>
                   <a:srgbClr val="332C46"/>
                 </a:solidFill>
@@ -3812,8 +3812,8 @@
         </p:nvSpPr>
         <p:spPr>
           <a:xfrm>
-            <a:off x="-3276600" y="7058025"/>
-            <a:ext cx="16840200" cy="133350"/>
+            <a:off x="-3276600" y="8001000"/>
+            <a:ext cx="16840200" cy="190500"/>
           </a:xfrm>
           <a:prstGeom prst="rect">
             <a:avLst/>
@@ -3826,7 +3826,7 @@
           <a:p>
             <a:pPr algn="ctr"/>
             <a:r>
-              <a:rPr sz="900" i="0" b="1" spc="252">
+              <a:rPr sz="1275" i="0" b="1" spc="280">
                 <a:solidFill>
                   <a:srgbClr val="8A8090"/>
                 </a:solidFill>
@@ -3847,8 +3847,8 @@
         </p:nvSpPr>
         <p:spPr>
           <a:xfrm>
-            <a:off x="762000" y="10477500"/>
-            <a:ext cx="746760" cy="257175"/>
+            <a:off x="762000" y="11106150"/>
+            <a:ext cx="929640" cy="400050"/>
           </a:xfrm>
           <a:prstGeom prst="rect">
             <a:avLst/>
@@ -3861,7 +3861,7 @@
           <a:p>
             <a:pPr algn="l"/>
             <a:r>
-              <a:rPr sz="1800" i="1" b="0">
+              <a:rPr sz="2700" i="1" b="0">
                 <a:solidFill>
                   <a:srgbClr val="A98BA6"/>
                 </a:solidFill>
@@ -3882,8 +3882,8 @@
         </p:nvSpPr>
         <p:spPr>
           <a:xfrm>
-            <a:off x="1162050" y="10477500"/>
-            <a:ext cx="1898809" cy="238125"/>
+            <a:off x="1295400" y="11106150"/>
+            <a:ext cx="2450544" cy="314325"/>
           </a:xfrm>
           <a:prstGeom prst="rect">
             <a:avLst/>
@@ -3896,7 +3896,7 @@
           <a:p>
             <a:pPr algn="l"/>
             <a:r>
-              <a:rPr sz="1650" i="0" b="0">
+              <a:rPr sz="2250" i="0" b="0">
                 <a:solidFill>
                   <a:srgbClr val="332C46"/>
                 </a:solidFill>
@@ -3917,8 +3917,8 @@
         </p:nvSpPr>
         <p:spPr>
           <a:xfrm>
-            <a:off x="2153096" y="10534650"/>
-            <a:ext cx="4049316" cy="161925"/>
+            <a:off x="2631281" y="11182350"/>
+            <a:ext cx="5516642" cy="219075"/>
           </a:xfrm>
           <a:prstGeom prst="rect">
             <a:avLst/>
@@ -3931,7 +3931,7 @@
           <a:p>
             <a:pPr algn="l"/>
             <a:r>
-              <a:rPr sz="1125" i="0" b="0">
+              <a:rPr sz="1575" i="0" b="0">
                 <a:solidFill>
                   <a:srgbClr val="8A8090"/>
                 </a:solidFill>
@@ -3952,8 +3952,8 @@
         </p:nvSpPr>
         <p:spPr>
           <a:xfrm>
-            <a:off x="762000" y="11125200"/>
-            <a:ext cx="746760" cy="257175"/>
+            <a:off x="762000" y="12011025"/>
+            <a:ext cx="929640" cy="400050"/>
           </a:xfrm>
           <a:prstGeom prst="rect">
             <a:avLst/>
@@ -3966,7 +3966,7 @@
           <a:p>
             <a:pPr algn="l"/>
             <a:r>
-              <a:rPr sz="1800" i="1" b="0">
+              <a:rPr sz="2700" i="1" b="0">
                 <a:solidFill>
                   <a:srgbClr val="A98BA6"/>
                 </a:solidFill>
@@ -3987,8 +3987,8 @@
         </p:nvSpPr>
         <p:spPr>
           <a:xfrm>
-            <a:off x="1162050" y="11125200"/>
-            <a:ext cx="1428512" cy="238125"/>
+            <a:off x="1295400" y="12011025"/>
+            <a:ext cx="1809512" cy="314325"/>
           </a:xfrm>
           <a:prstGeom prst="rect">
             <a:avLst/>
@@ -4001,7 +4001,7 @@
           <a:p>
             <a:pPr algn="l"/>
             <a:r>
-              <a:rPr sz="1650" i="0" b="0">
+              <a:rPr sz="2250" i="0" b="0">
                 <a:solidFill>
                   <a:srgbClr val="332C46"/>
                 </a:solidFill>
@@ -4022,8 +4022,8 @@
         </p:nvSpPr>
         <p:spPr>
           <a:xfrm>
-            <a:off x="1859161" y="11182350"/>
-            <a:ext cx="4091702" cy="161925"/>
+            <a:off x="2230636" y="12087225"/>
+            <a:ext cx="5575935" cy="219075"/>
           </a:xfrm>
           <a:prstGeom prst="rect">
             <a:avLst/>
@@ -4036,7 +4036,7 @@
           <a:p>
             <a:pPr algn="l"/>
             <a:r>
-              <a:rPr sz="1125" i="0" b="0">
+              <a:rPr sz="1575" i="0" b="0">
                 <a:solidFill>
                   <a:srgbClr val="8A8090"/>
                 </a:solidFill>
@@ -4057,8 +4057,8 @@
         </p:nvSpPr>
         <p:spPr>
           <a:xfrm>
-            <a:off x="762000" y="11772900"/>
-            <a:ext cx="746760" cy="257175"/>
+            <a:off x="762000" y="12915900"/>
+            <a:ext cx="929640" cy="400050"/>
           </a:xfrm>
           <a:prstGeom prst="rect">
             <a:avLst/>
@@ -4071,7 +4071,7 @@
           <a:p>
             <a:pPr algn="l"/>
             <a:r>
-              <a:rPr sz="1800" i="1" b="0">
+              <a:rPr sz="2700" i="1" b="0">
                 <a:solidFill>
                   <a:srgbClr val="A98BA6"/>
                 </a:solidFill>
@@ -4092,8 +4092,8 @@
         </p:nvSpPr>
         <p:spPr>
           <a:xfrm>
-            <a:off x="1162050" y="11772900"/>
-            <a:ext cx="2057400" cy="238125"/>
+            <a:off x="1295400" y="12915900"/>
+            <a:ext cx="2667000" cy="314325"/>
           </a:xfrm>
           <a:prstGeom prst="rect">
             <a:avLst/>
@@ -4106,7 +4106,7 @@
           <a:p>
             <a:pPr algn="l"/>
             <a:r>
-              <a:rPr sz="1650" i="0" b="0">
+              <a:rPr sz="2250" i="0" b="0">
                 <a:solidFill>
                   <a:srgbClr val="332C46"/>
                 </a:solidFill>
@@ -4127,8 +4127,8 @@
         </p:nvSpPr>
         <p:spPr>
           <a:xfrm>
-            <a:off x="2252216" y="11830050"/>
-            <a:ext cx="3824764" cy="161925"/>
+            <a:off x="2766566" y="12992100"/>
+            <a:ext cx="5202317" cy="219075"/>
           </a:xfrm>
           <a:prstGeom prst="rect">
             <a:avLst/>
@@ -4141,7 +4141,7 @@
           <a:p>
             <a:pPr algn="l"/>
             <a:r>
-              <a:rPr sz="1125" i="0" b="0">
+              <a:rPr sz="1575" i="0" b="0">
                 <a:solidFill>
                   <a:srgbClr val="8A8090"/>
                 </a:solidFill>
@@ -4162,8 +4162,8 @@
         </p:nvSpPr>
         <p:spPr>
           <a:xfrm>
-            <a:off x="1266825" y="16035338"/>
-            <a:ext cx="3218498" cy="152400"/>
+            <a:off x="1323975" y="15878175"/>
+            <a:ext cx="4739164" cy="247650"/>
           </a:xfrm>
           <a:prstGeom prst="rect">
             <a:avLst/>
@@ -4176,7 +4176,7 @@
           <a:p>
             <a:pPr algn="l"/>
             <a:r>
-              <a:rPr sz="1050" i="0" b="1" spc="231">
+              <a:rPr sz="1650" i="0" b="1" spc="330">
                 <a:solidFill>
                   <a:srgbClr val="332C46"/>
                 </a:solidFill>
@@ -4197,7 +4197,7 @@
         </p:nvSpPr>
         <p:spPr>
           <a:xfrm>
-            <a:off x="3173611" y="16021050"/>
+            <a:off x="4200227" y="15911512"/>
             <a:ext cx="579120" cy="180975"/>
           </a:xfrm>
           <a:prstGeom prst="rect">
@@ -4232,8 +4232,8 @@
         </p:nvSpPr>
         <p:spPr>
           <a:xfrm>
-            <a:off x="-2057400" y="17306925"/>
-            <a:ext cx="14401800" cy="123825"/>
+            <a:off x="-2057400" y="17249775"/>
+            <a:ext cx="14401800" cy="180975"/>
           </a:xfrm>
           <a:prstGeom prst="rect">
             <a:avLst/>
@@ -4246,7 +4246,7 @@
           <a:p>
             <a:pPr algn="ctr"/>
             <a:r>
-              <a:rPr sz="825" i="0" b="1" spc="264">
+              <a:rPr sz="1200" i="0" b="1" spc="360">
                 <a:solidFill>
                   <a:srgbClr val="332C46"/>
                 </a:solidFill>
@@ -4275,8 +4275,8 @@
         </p:blipFill>
         <p:spPr>
           <a:xfrm>
-            <a:off x="3429000" y="2190750"/>
-            <a:ext cx="3429000" cy="3429000"/>
+            <a:off x="3048000" y="2000250"/>
+            <a:ext cx="4191000" cy="4191000"/>
           </a:xfrm>
           <a:prstGeom prst="rect">
             <a:avLst/>

--- a/coastal-18-about-me.pptx
+++ b/coastal-18-about-me.pptx
@@ -3316,7 +3316,7 @@
         </p:nvSpPr>
         <p:spPr>
           <a:xfrm>
-            <a:off x="762000" y="11753850"/>
+            <a:off x="762000" y="11801475"/>
             <a:ext cx="8763000" cy="9525"/>
           </a:xfrm>
           <a:prstGeom prst="rect">
@@ -3360,7 +3360,7 @@
         </p:nvSpPr>
         <p:spPr>
           <a:xfrm>
-            <a:off x="762000" y="12658725"/>
+            <a:off x="762000" y="12753975"/>
             <a:ext cx="8763000" cy="9525"/>
           </a:xfrm>
           <a:prstGeom prst="rect">
@@ -3404,7 +3404,7 @@
         </p:nvSpPr>
         <p:spPr>
           <a:xfrm>
-            <a:off x="762000" y="13563600"/>
+            <a:off x="762000" y="13706475"/>
             <a:ext cx="8763000" cy="9525"/>
           </a:xfrm>
           <a:prstGeom prst="rect">
@@ -3448,8 +3448,8 @@
         </p:nvSpPr>
         <p:spPr>
           <a:xfrm>
-            <a:off x="762000" y="15621000"/>
-            <a:ext cx="3895427" cy="9525"/>
+            <a:off x="762000" y="15516225"/>
+            <a:ext cx="4608909" cy="9525"/>
           </a:xfrm>
           <a:prstGeom prst="rect">
             <a:avLst/>
@@ -3493,7 +3493,7 @@
         <p:spPr>
           <a:xfrm>
             <a:off x="762000" y="16373475"/>
-            <a:ext cx="3895427" cy="9525"/>
+            <a:ext cx="4608909" cy="9525"/>
           </a:xfrm>
           <a:prstGeom prst="rect">
             <a:avLst/>
@@ -3536,8 +3536,8 @@
         </p:nvSpPr>
         <p:spPr>
           <a:xfrm>
-            <a:off x="762000" y="15621000"/>
-            <a:ext cx="9525" cy="762000"/>
+            <a:off x="762000" y="15516225"/>
+            <a:ext cx="9525" cy="866775"/>
           </a:xfrm>
           <a:prstGeom prst="rect">
             <a:avLst/>
@@ -3580,8 +3580,8 @@
         </p:nvSpPr>
         <p:spPr>
           <a:xfrm>
-            <a:off x="4647902" y="15621000"/>
-            <a:ext cx="9525" cy="762000"/>
+            <a:off x="5361384" y="15516225"/>
+            <a:ext cx="9525" cy="866775"/>
           </a:xfrm>
           <a:prstGeom prst="rect">
             <a:avLst/>
@@ -3624,7 +3624,7 @@
         </p:nvSpPr>
         <p:spPr>
           <a:xfrm>
-            <a:off x="1079593" y="15948118"/>
+            <a:off x="1117693" y="15895731"/>
             <a:ext cx="107763" cy="107763"/>
           </a:xfrm>
           <a:prstGeom prst="rect">
@@ -3707,8 +3707,8 @@
         </p:nvSpPr>
         <p:spPr>
           <a:xfrm>
-            <a:off x="6988076" y="904875"/>
-            <a:ext cx="4440079" cy="171450"/>
+            <a:off x="6649938" y="885825"/>
+            <a:ext cx="4981099" cy="209550"/>
           </a:xfrm>
           <a:prstGeom prst="rect">
             <a:avLst/>
@@ -3721,7 +3721,7 @@
           <a:p>
             <a:pPr algn="l"/>
             <a:r>
-              <a:rPr sz="1200" i="0" b="1" spc="360">
+              <a:rPr sz="1425" i="0" b="1" spc="370">
                 <a:solidFill>
                   <a:srgbClr val="332C46"/>
                 </a:solidFill>
@@ -3743,7 +3743,7 @@
         <p:spPr>
           <a:xfrm>
             <a:off x="-3276600" y="6648450"/>
-            <a:ext cx="16840200" cy="228600"/>
+            <a:ext cx="16840200" cy="247650"/>
           </a:xfrm>
           <a:prstGeom prst="rect">
             <a:avLst/>
@@ -3756,7 +3756,7 @@
           <a:p>
             <a:pPr algn="ctr"/>
             <a:r>
-              <a:rPr sz="1575" i="0" b="1" spc="472">
+              <a:rPr sz="1650" i="0" b="1" spc="462">
                 <a:solidFill>
                   <a:srgbClr val="A98BA6"/>
                 </a:solidFill>
@@ -3777,7 +3777,7 @@
         </p:nvSpPr>
         <p:spPr>
           <a:xfrm>
-            <a:off x="-3276600" y="7029450"/>
+            <a:off x="-3276600" y="7048500"/>
             <a:ext cx="16840200" cy="857250"/>
           </a:xfrm>
           <a:prstGeom prst="rect">
@@ -3812,8 +3812,8 @@
         </p:nvSpPr>
         <p:spPr>
           <a:xfrm>
-            <a:off x="-3276600" y="8001000"/>
-            <a:ext cx="16840200" cy="190500"/>
+            <a:off x="-3276600" y="8039100"/>
+            <a:ext cx="16840200" cy="209550"/>
           </a:xfrm>
           <a:prstGeom prst="rect">
             <a:avLst/>
@@ -3826,7 +3826,7 @@
           <a:p>
             <a:pPr algn="ctr"/>
             <a:r>
-              <a:rPr sz="1275" i="0" b="1" spc="280">
+              <a:rPr sz="1425" i="0" b="1" spc="285">
                 <a:solidFill>
                   <a:srgbClr val="8A8090"/>
                 </a:solidFill>
@@ -3848,7 +3848,7 @@
         <p:spPr>
           <a:xfrm>
             <a:off x="762000" y="11106150"/>
-            <a:ext cx="929640" cy="400050"/>
+            <a:ext cx="990600" cy="447675"/>
           </a:xfrm>
           <a:prstGeom prst="rect">
             <a:avLst/>
@@ -3861,7 +3861,7 @@
           <a:p>
             <a:pPr algn="l"/>
             <a:r>
-              <a:rPr sz="2700" i="1" b="0">
+              <a:rPr sz="3000" i="1" b="0">
                 <a:solidFill>
                   <a:srgbClr val="A98BA6"/>
                 </a:solidFill>
@@ -3882,8 +3882,8 @@
         </p:nvSpPr>
         <p:spPr>
           <a:xfrm>
-            <a:off x="1295400" y="11106150"/>
-            <a:ext cx="2450544" cy="314325"/>
+            <a:off x="1333500" y="11106150"/>
+            <a:ext cx="2795588" cy="371475"/>
           </a:xfrm>
           <a:prstGeom prst="rect">
             <a:avLst/>
@@ -3896,7 +3896,7 @@
           <a:p>
             <a:pPr algn="l"/>
             <a:r>
-              <a:rPr sz="2250" i="0" b="0">
+              <a:rPr sz="2625" i="0" b="0">
                 <a:solidFill>
                   <a:srgbClr val="332C46"/>
                 </a:solidFill>
@@ -3917,8 +3917,8 @@
         </p:nvSpPr>
         <p:spPr>
           <a:xfrm>
-            <a:off x="2631281" y="11182350"/>
-            <a:ext cx="5516642" cy="219075"/>
+            <a:off x="2885033" y="11210925"/>
+            <a:ext cx="5761196" cy="238125"/>
           </a:xfrm>
           <a:prstGeom prst="rect">
             <a:avLst/>
@@ -3931,7 +3931,7 @@
           <a:p>
             <a:pPr algn="l"/>
             <a:r>
-              <a:rPr sz="1575" i="0" b="0">
+              <a:rPr sz="1650" i="0" b="0">
                 <a:solidFill>
                   <a:srgbClr val="8A8090"/>
                 </a:solidFill>
@@ -3952,8 +3952,8 @@
         </p:nvSpPr>
         <p:spPr>
           <a:xfrm>
-            <a:off x="762000" y="12011025"/>
-            <a:ext cx="929640" cy="400050"/>
+            <a:off x="762000" y="12058650"/>
+            <a:ext cx="990600" cy="447675"/>
           </a:xfrm>
           <a:prstGeom prst="rect">
             <a:avLst/>
@@ -3966,7 +3966,7 @@
           <a:p>
             <a:pPr algn="l"/>
             <a:r>
-              <a:rPr sz="2700" i="1" b="0">
+              <a:rPr sz="3000" i="1" b="0">
                 <a:solidFill>
                   <a:srgbClr val="A98BA6"/>
                 </a:solidFill>
@@ -3987,8 +3987,8 @@
         </p:nvSpPr>
         <p:spPr>
           <a:xfrm>
-            <a:off x="1295400" y="12011025"/>
-            <a:ext cx="1809512" cy="314325"/>
+            <a:off x="1333500" y="12058650"/>
+            <a:ext cx="2047399" cy="371475"/>
           </a:xfrm>
           <a:prstGeom prst="rect">
             <a:avLst/>
@@ -4001,7 +4001,7 @@
           <a:p>
             <a:pPr algn="l"/>
             <a:r>
-              <a:rPr sz="2250" i="0" b="0">
+              <a:rPr sz="2625" i="0" b="0">
                 <a:solidFill>
                   <a:srgbClr val="332C46"/>
                 </a:solidFill>
@@ -4022,8 +4022,8 @@
         </p:nvSpPr>
         <p:spPr>
           <a:xfrm>
-            <a:off x="2230636" y="12087225"/>
-            <a:ext cx="5575935" cy="219075"/>
+            <a:off x="2417415" y="12163425"/>
+            <a:ext cx="5823109" cy="238125"/>
           </a:xfrm>
           <a:prstGeom prst="rect">
             <a:avLst/>
@@ -4036,7 +4036,7 @@
           <a:p>
             <a:pPr algn="l"/>
             <a:r>
-              <a:rPr sz="1575" i="0" b="0">
+              <a:rPr sz="1650" i="0" b="0">
                 <a:solidFill>
                   <a:srgbClr val="8A8090"/>
                 </a:solidFill>
@@ -4057,8 +4057,8 @@
         </p:nvSpPr>
         <p:spPr>
           <a:xfrm>
-            <a:off x="762000" y="12915900"/>
-            <a:ext cx="929640" cy="400050"/>
+            <a:off x="762000" y="13011150"/>
+            <a:ext cx="990600" cy="447675"/>
           </a:xfrm>
           <a:prstGeom prst="rect">
             <a:avLst/>
@@ -4071,7 +4071,7 @@
           <a:p>
             <a:pPr algn="l"/>
             <a:r>
-              <a:rPr sz="2700" i="1" b="0">
+              <a:rPr sz="3000" i="1" b="0">
                 <a:solidFill>
                   <a:srgbClr val="A98BA6"/>
                 </a:solidFill>
@@ -4092,8 +4092,8 @@
         </p:nvSpPr>
         <p:spPr>
           <a:xfrm>
-            <a:off x="1295400" y="12915900"/>
-            <a:ext cx="2667000" cy="314325"/>
+            <a:off x="1333500" y="13011150"/>
+            <a:ext cx="3048000" cy="371475"/>
           </a:xfrm>
           <a:prstGeom prst="rect">
             <a:avLst/>
@@ -4106,7 +4106,7 @@
           <a:p>
             <a:pPr algn="l"/>
             <a:r>
-              <a:rPr sz="2250" i="0" b="0">
+              <a:rPr sz="2625" i="0" b="0">
                 <a:solidFill>
                   <a:srgbClr val="332C46"/>
                 </a:solidFill>
@@ -4127,8 +4127,8 @@
         </p:nvSpPr>
         <p:spPr>
           <a:xfrm>
-            <a:off x="2766566" y="12992100"/>
-            <a:ext cx="5202317" cy="219075"/>
+            <a:off x="3042791" y="13115925"/>
+            <a:ext cx="5431869" cy="238125"/>
           </a:xfrm>
           <a:prstGeom prst="rect">
             <a:avLst/>
@@ -4141,7 +4141,7 @@
           <a:p>
             <a:pPr algn="l"/>
             <a:r>
-              <a:rPr sz="1575" i="0" b="0">
+              <a:rPr sz="1650" i="0" b="0">
                 <a:solidFill>
                   <a:srgbClr val="8A8090"/>
                 </a:solidFill>
@@ -4162,8 +4162,8 @@
         </p:nvSpPr>
         <p:spPr>
           <a:xfrm>
-            <a:off x="1323975" y="15878175"/>
-            <a:ext cx="4739164" cy="247650"/>
+            <a:off x="1362075" y="15801975"/>
+            <a:ext cx="5606415" cy="295275"/>
           </a:xfrm>
           <a:prstGeom prst="rect">
             <a:avLst/>
@@ -4176,7 +4176,7 @@
           <a:p>
             <a:pPr algn="l"/>
             <a:r>
-              <a:rPr sz="1650" i="0" b="1" spc="330">
+              <a:rPr sz="2025" i="0" b="1" spc="364">
                 <a:solidFill>
                   <a:srgbClr val="332C46"/>
                 </a:solidFill>
@@ -4197,8 +4197,8 @@
         </p:nvSpPr>
         <p:spPr>
           <a:xfrm>
-            <a:off x="4200227" y="15911512"/>
-            <a:ext cx="579120" cy="180975"/>
+            <a:off x="4780359" y="15792450"/>
+            <a:ext cx="731520" cy="314325"/>
           </a:xfrm>
           <a:prstGeom prst="rect">
             <a:avLst/>
@@ -4211,7 +4211,7 @@
           <a:p>
             <a:pPr algn="l"/>
             <a:r>
-              <a:rPr sz="1200" i="0" b="0">
+              <a:rPr sz="2100" i="0" b="0">
                 <a:solidFill>
                   <a:srgbClr val="A98BA6"/>
                 </a:solidFill>
@@ -4232,8 +4232,8 @@
         </p:nvSpPr>
         <p:spPr>
           <a:xfrm>
-            <a:off x="-2057400" y="17249775"/>
-            <a:ext cx="14401800" cy="180975"/>
+            <a:off x="-2057400" y="17211675"/>
+            <a:ext cx="14401800" cy="219075"/>
           </a:xfrm>
           <a:prstGeom prst="rect">
             <a:avLst/>
@@ -4246,7 +4246,7 @@
           <a:p>
             <a:pPr algn="ctr"/>
             <a:r>
-              <a:rPr sz="1200" i="0" b="1" spc="360">
+              <a:rPr sz="1425" i="0" b="1" spc="370">
                 <a:solidFill>
                   <a:srgbClr val="332C46"/>
                 </a:solidFill>
